--- a/docs/goglobal-presentation-v5.pptx
+++ b/docs/goglobal-presentation-v5.pptx
@@ -12693,7 +12693,7 @@
         </p:nvGraphicFramePr>
         <p:xfrm>
           <a:off x="640080" y="1965960"/>
-          <a:ext cx="5303519" cy="2336800"/>
+          <a:ext cx="5303519" cy="2628900"/>
         </p:xfrm>
         <a:graphic>
           <a:graphicData uri="http://schemas.openxmlformats.org/drawingml/2006/table">
@@ -12907,11 +12907,11 @@
                       <a:r>
                         <a:rPr sz="1050" b="1">
                           <a:solidFill>
-                            <a:srgbClr val="FDE68A"/>
-                          </a:solidFill>
-                          <a:latin typeface="Arial"/>
-                        </a:rPr>
-                        <a:t>Не ответил</a:t>
+                            <a:srgbClr val="A5B4FC"/>
+                          </a:solidFill>
+                          <a:latin typeface="Arial"/>
+                        </a:rPr>
+                        <a:t>Дубль</a:t>
                       </a:r>
                     </a:p>
                   </a:txBody>
@@ -12934,7 +12934,7 @@
                           </a:solidFill>
                           <a:latin typeface="Arial"/>
                         </a:rPr>
-                        <a:t>Не берёт трубку</a:t>
+                        <a:t>Повторное обращение (автоматически)</a:t>
                       </a:r>
                     </a:p>
                   </a:txBody>
@@ -12959,7 +12959,7 @@
                           </a:solidFill>
                           <a:latin typeface="Arial"/>
                         </a:rPr>
-                        <a:t>Подойдёт в офис</a:t>
+                        <a:t>Не ответил</a:t>
                       </a:r>
                     </a:p>
                   </a:txBody>
@@ -12982,7 +12982,7 @@
                           </a:solidFill>
                           <a:latin typeface="Arial"/>
                         </a:rPr>
-                        <a:t>Встреча (система спросит дату)</a:t>
+                        <a:t>Не берёт трубку</a:t>
                       </a:r>
                     </a:p>
                   </a:txBody>
@@ -13003,11 +13003,11 @@
                       <a:r>
                         <a:rPr sz="1050" b="1">
                           <a:solidFill>
-                            <a:srgbClr val="86EFAC"/>
-                          </a:solidFill>
-                          <a:latin typeface="Arial"/>
-                        </a:rPr>
-                        <a:t>Закрыт ✅ (won)</a:t>
+                            <a:srgbClr val="FDE68A"/>
+                          </a:solidFill>
+                          <a:latin typeface="Arial"/>
+                        </a:rPr>
+                        <a:t>Подойдёт в офис</a:t>
                       </a:r>
                     </a:p>
                   </a:txBody>
@@ -13030,7 +13030,7 @@
                           </a:solidFill>
                           <a:latin typeface="Arial"/>
                         </a:rPr>
-                        <a:t>Контракт подписан</a:t>
+                        <a:t>Встреча (система спросит дату)</a:t>
                       </a:r>
                     </a:p>
                   </a:txBody>
@@ -13051,6 +13051,54 @@
                       <a:r>
                         <a:rPr sz="1050" b="1">
                           <a:solidFill>
+                            <a:srgbClr val="86EFAC"/>
+                          </a:solidFill>
+                          <a:latin typeface="Arial"/>
+                        </a:rPr>
+                        <a:t>Закрыт ✅ (won)</a:t>
+                      </a:r>
+                    </a:p>
+                  </a:txBody>
+                  <a:tcPr>
+                    <a:solidFill>
+                      <a:srgbClr val="0B0C0F"/>
+                    </a:solidFill>
+                  </a:tcPr>
+                </a:tc>
+                <a:tc>
+                  <a:txBody>
+                    <a:bodyPr wrap="square" lIns="76200" rIns="76200" tIns="38100" bIns="38100"/>
+                    <a:lstStyle/>
+                    <a:p>
+                      <a:pPr algn="l"/>
+                      <a:r>
+                        <a:rPr sz="1050" b="0">
+                          <a:solidFill>
+                            <a:srgbClr val="E7E9EE"/>
+                          </a:solidFill>
+                          <a:latin typeface="Arial"/>
+                        </a:rPr>
+                        <a:t>Контракт подписан</a:t>
+                      </a:r>
+                    </a:p>
+                  </a:txBody>
+                  <a:tcPr>
+                    <a:solidFill>
+                      <a:srgbClr val="0B0C0F"/>
+                    </a:solidFill>
+                  </a:tcPr>
+                </a:tc>
+              </a:tr>
+              <a:tr h="292100">
+                <a:tc>
+                  <a:txBody>
+                    <a:bodyPr wrap="square" lIns="76200" rIns="76200" tIns="38100" bIns="38100"/>
+                    <a:lstStyle/>
+                    <a:p>
+                      <a:pPr algn="l"/>
+                      <a:r>
+                        <a:rPr sz="1050" b="1">
+                          <a:solidFill>
                             <a:srgbClr val="FDA4AF"/>
                           </a:solidFill>
                           <a:latin typeface="Arial"/>
@@ -13061,7 +13109,7 @@
                   </a:txBody>
                   <a:tcPr>
                     <a:solidFill>
-                      <a:srgbClr val="0B0C0F"/>
+                      <a:srgbClr val="0D1628"/>
                     </a:solidFill>
                   </a:tcPr>
                 </a:tc>
@@ -13084,7 +13132,7 @@
                   </a:txBody>
                   <a:tcPr>
                     <a:solidFill>
-                      <a:srgbClr val="0B0C0F"/>
+                      <a:srgbClr val="0D1628"/>
                     </a:solidFill>
                   </a:tcPr>
                 </a:tc>
